--- a/evidence/2026-10-02/run-fair/raw/libreoffice/feature-matrix/warmup-1.pptx
+++ b/evidence/2026-10-02/run-fair/raw/libreoffice/feature-matrix/warmup-1.pptx
@@ -424,7 +424,7 @@
             <a:pPr indent="0" algn="r">
               <a:buNone/>
             </a:pPr>
-            <a:fld id="{D826691F-441C-47F6-BA54-372A79BD2D23}" type="slidenum">
+            <a:fld id="{2C7F20AB-C8EA-45FE-B586-3589743CFD38}" type="slidenum">
               <a:rPr lang="en-US" sz="1400" b="0" u="none" strike="noStrike">
                 <a:solidFill>
                   <a:srgbClr val="000000"/>
@@ -598,7 +598,7 @@
               </a:lnSpc>
               <a:buNone/>
             </a:pPr>
-            <a:fld id="{F295B1AF-C31A-42BB-9588-3468A4471417}" type="slidenum">
+            <a:fld id="{AEC29A45-A249-4E71-82E8-B87004025C2D}" type="slidenum">
               <a:rPr lang="en-US" sz="1200" b="0" u="none" strike="noStrike">
                 <a:solidFill>
                   <a:srgbClr val="000000"/>
@@ -915,7 +915,7 @@
               </a:lnSpc>
               <a:buNone/>
             </a:pPr>
-            <a:fld id="{D2EBD215-D727-4DB5-A862-0199AAA0162D}" type="slidenum">
+            <a:fld id="{AEE3F6F6-27A8-4E25-AD28-C3D0E5F67442}" type="slidenum">
               <a:rPr lang="en-US" sz="1200" b="0" u="none" strike="noStrike">
                 <a:solidFill>
                   <a:schemeClr val="dk1">
@@ -1627,7 +1627,7 @@
               </a:lnSpc>
               <a:buNone/>
             </a:pPr>
-            <a:fld id="{CBDFDC83-684A-4B08-AD01-89CB7F31CE2A}" type="slidenum">
+            <a:fld id="{59D020B1-BC8B-4FD3-8320-E2638D908130}" type="slidenum">
               <a:rPr lang="en-US" sz="1200" b="0" u="none" strike="noStrike">
                 <a:solidFill>
                   <a:schemeClr val="dk1">
@@ -2086,7 +2086,7 @@
               </a:lnSpc>
               <a:buNone/>
             </a:pPr>
-            <a:fld id="{65136B56-EC00-4C87-836E-C941E8221D83}" type="slidenum">
+            <a:fld id="{EC1AAB9D-12C5-4EB5-8301-3110C6D77312}" type="slidenum">
               <a:rPr lang="en-US" sz="1200" b="0" u="none" strike="noStrike">
                 <a:solidFill>
                   <a:schemeClr val="dk1">
@@ -2714,7 +2714,7 @@
               </a:lnSpc>
               <a:buNone/>
             </a:pPr>
-            <a:fld id="{ACB0B44D-87B1-4407-AAE4-419AFB0695D2}" type="slidenum">
+            <a:fld id="{79726CC2-F238-418A-8102-C77FB91F1558}" type="slidenum">
               <a:rPr lang="en-US" sz="1200" b="0" u="none" strike="noStrike">
                 <a:solidFill>
                   <a:schemeClr val="dk1">
@@ -3342,7 +3342,7 @@
               </a:lnSpc>
               <a:buNone/>
             </a:pPr>
-            <a:fld id="{3607BE1B-4FFD-4DEF-8CFE-8D7B30893223}" type="slidenum">
+            <a:fld id="{1F4797E0-A797-49CC-B5AA-8AE6AA084183}" type="slidenum">
               <a:rPr lang="en-US" sz="1200" b="0" u="none" strike="noStrike">
                 <a:solidFill>
                   <a:schemeClr val="dk1">
@@ -3970,7 +3970,7 @@
               </a:lnSpc>
               <a:buNone/>
             </a:pPr>
-            <a:fld id="{A9BFE23D-D758-4707-B173-F2FA0C1ED187}" type="slidenum">
+            <a:fld id="{BEDC9F52-E5D3-447C-8A45-175111BE330B}" type="slidenum">
               <a:rPr lang="en-US" sz="1200" b="0" u="none" strike="noStrike">
                 <a:solidFill>
                   <a:schemeClr val="dk1">
@@ -4382,7 +4382,7 @@
               </a:lnSpc>
               <a:buNone/>
             </a:pPr>
-            <a:fld id="{5AE490EA-9B82-468D-A4F7-CB05C905926D}" type="slidenum">
+            <a:fld id="{9AD93336-9CF2-4281-8263-167B2049E02F}" type="slidenum">
               <a:rPr lang="en-US" sz="1200" b="0" u="none" strike="noStrike">
                 <a:solidFill>
                   <a:schemeClr val="dk1">
@@ -5316,7 +5316,7 @@
               </a:lnSpc>
               <a:buNone/>
             </a:pPr>
-            <a:fld id="{2E6D9ECA-C637-4FB5-9336-6C5FCE8449EE}" type="slidenum">
+            <a:fld id="{6DA2AAEB-F686-4404-AF62-3BD63F3E8B58}" type="slidenum">
               <a:rPr lang="en-US" sz="1200" b="0" u="none" strike="noStrike">
                 <a:solidFill>
                   <a:schemeClr val="dk1">
@@ -6478,7 +6478,7 @@
               </a:lnSpc>
               <a:buNone/>
             </a:pPr>
-            <a:fld id="{A68AF12E-0B8B-4CA0-88D6-2D17564A8DB6}" type="slidenum">
+            <a:fld id="{1D6E9A9F-8840-49A0-BD0C-EADAEED9236C}" type="slidenum">
               <a:rPr lang="en-US" sz="1200" b="0" u="none" strike="noStrike">
                 <a:solidFill>
                   <a:schemeClr val="dk1">
@@ -6800,7 +6800,7 @@
               </a:lnSpc>
               <a:buNone/>
             </a:pPr>
-            <a:fld id="{4576561B-36C8-4C03-942A-0407041480DE}" type="slidenum">
+            <a:fld id="{69A11151-1AB5-4B12-BF2F-F61DF1FCD39C}" type="slidenum">
               <a:rPr lang="en-US" sz="1200" b="0" u="none" strike="noStrike">
                 <a:solidFill>
                   <a:schemeClr val="dk1">
@@ -7050,7 +7050,7 @@
               </a:lnSpc>
               <a:buNone/>
             </a:pPr>
-            <a:fld id="{D6CEC395-4D5E-437D-B484-43D2CBC30408}" type="slidenum">
+            <a:fld id="{DCB88B67-B3E7-446A-A903-8136238EB173}" type="slidenum">
               <a:rPr lang="en-US" sz="1200" b="0" u="none" strike="noStrike">
                 <a:solidFill>
                   <a:schemeClr val="dk1">
